--- a/docs/reports/2026-09-15-real-robot-tracking/双移动机器人实物跟踪实验汇报.pptx
+++ b/docs/reports/2026-09-15-real-robot-tracking/双移动机器人实物跟踪实验汇报.pptx
@@ -3314,7 +3314,7 @@
           <a:noFill/>
         </p:spPr>
         <p:txBody>
-          <a:bodyPr wrap="none">
+          <a:bodyPr wrap="square">
             <a:spAutoFit/>
           </a:bodyPr>
           <a:lstStyle/>
@@ -3505,7 +3505,7 @@
           <a:noFill/>
         </p:spPr>
         <p:txBody>
-          <a:bodyPr wrap="none">
+          <a:bodyPr wrap="square">
             <a:spAutoFit/>
           </a:bodyPr>
           <a:lstStyle/>
@@ -3672,7 +3672,7 @@
           <a:noFill/>
         </p:spPr>
         <p:txBody>
-          <a:bodyPr wrap="none">
+          <a:bodyPr wrap="square">
             <a:spAutoFit/>
           </a:bodyPr>
           <a:lstStyle/>
@@ -3855,7 +3855,7 @@
           <a:noFill/>
         </p:spPr>
         <p:txBody>
-          <a:bodyPr wrap="none">
+          <a:bodyPr wrap="square">
             <a:spAutoFit/>
           </a:bodyPr>
           <a:lstStyle/>
@@ -3864,7 +3864,7 @@
               <a:spcAft>
                 <a:spcPts val="1400"/>
               </a:spcAft>
-              <a:defRPr sz="1700">
+              <a:defRPr sz="1500">
                 <a:solidFill>
                   <a:srgbClr val="2D2D2D"/>
                 </a:solidFill>
@@ -3872,7 +3872,7 @@
               </a:defRPr>
             </a:pPr>
             <a:r>
-              <a:t>有效记录均来自实物平台与动捕状态源；仅使用条件表、指标表中理想半径为 1.0 m 的数据。</a:t>
+              <a:t>共同配置：Leader /robot1；Follower /robot2；20 Hz；tau=0.43 s；Td=0.22 s。状态源：动捕。</a:t>
             </a:r>
           </a:p>
           <a:p>
@@ -3880,7 +3880,7 @@
               <a:spcAft>
                 <a:spcPts val="1400"/>
               </a:spcAft>
-              <a:defRPr sz="1700">
+              <a:defRPr sz="1500">
                 <a:solidFill>
                   <a:srgbClr val="2D2D2D"/>
                 </a:solidFill>
@@ -3888,7 +3888,7 @@
               </a:defRPr>
             </a:pPr>
             <a:r>
-              <a:t>Artstein-HPC 前馈开/关：Leader 平均速度均约 0.246 m/s，记录时长均约 45 s。</a:t>
+              <a:t>评价采用控制器 radius=1.0 m；recording.ideal_radius_m=2.0 为记录器历史配置，不参与本次误差计算。</a:t>
             </a:r>
           </a:p>
           <a:p>
@@ -3896,7 +3896,7 @@
               <a:spcAft>
                 <a:spcPts val="1400"/>
               </a:spcAft>
-              <a:defRPr sz="1700">
+              <a:defRPr sz="1500">
                 <a:solidFill>
                   <a:srgbClr val="2D2D2D"/>
                 </a:solidFill>
@@ -3904,7 +3904,7 @@
               </a:defRPr>
             </a:pPr>
             <a:r>
-              <a:t>Artstein-LPC：λ初值=2.0 对应 Leader 速度 0.20 m/s；λ初值=2.5 对应 0.25 m/s。</a:t>
+              <a:t>复现实验流程：准备机器人与动捕，核对状态话题和控制参数 → 启动 Follower 控制器与 Leader 轨迹 → 录制 45 s 并保存 raw.csv、metadata.yaml → 停止轨迹和控制器，确认两车停止。</a:t>
             </a:r>
           </a:p>
           <a:p>
@@ -3912,7 +3912,7 @@
               <a:spcAft>
                 <a:spcPts val="1400"/>
               </a:spcAft>
-              <a:defRPr sz="1700">
+              <a:defRPr sz="1500">
                 <a:solidFill>
                   <a:srgbClr val="2D2D2D"/>
                 </a:solidFill>
@@ -3920,7 +3920,39 @@
               </a:defRPr>
             </a:pPr>
             <a:r>
-              <a:t>不根据原始目录名或元数据中的控制器字符串重新推断前馈状态。</a:t>
+              <a:t>HPC 前馈开/关：Leader 均速约 0.246 m/s。LPC：λ=2.0 / 0.20 m/s；λ=2.5 / 0.25 m/s。</a:t>
+            </a:r>
+          </a:p>
+          <a:p>
+            <a:pPr>
+              <a:spcAft>
+                <a:spcPts val="1400"/>
+              </a:spcAft>
+              <a:defRPr sz="1500">
+                <a:solidFill>
+                  <a:srgbClr val="2D2D2D"/>
+                </a:solidFill>
+                <a:latin typeface="宋体"/>
+              </a:defRPr>
+            </a:pPr>
+            <a:r>
+              <a:t>前馈开关按元数据 enable_leader_cmd_feedforward 核对，不依据目录名或 controller 字符串。</a:t>
+            </a:r>
+          </a:p>
+          <a:p>
+            <a:pPr>
+              <a:spcAft>
+                <a:spcPts val="1400"/>
+              </a:spcAft>
+              <a:defRPr sz="1500">
+                <a:solidFill>
+                  <a:srgbClr val="2D2D2D"/>
+                </a:solidFill>
+                <a:latin typeface="宋体"/>
+              </a:defRPr>
+            </a:pPr>
+            <a:r>
+              <a:t>后续图表来源目录相对于 homo_multirobot_formation_control；使用各目录 raw.csv 与 metadata.yaml。</a:t>
             </a:r>
           </a:p>
         </p:txBody>
@@ -4086,7 +4118,7 @@
           <a:noFill/>
         </p:spPr>
         <p:txBody>
-          <a:bodyPr wrap="none">
+          <a:bodyPr wrap="square">
             <a:spAutoFit/>
           </a:bodyPr>
           <a:lstStyle/>
@@ -4102,6 +4134,43 @@
               <a:t>开启：平均绝对误差 0.1202 m；RMS 0.2791 m；末帧 0.0355 m
 关闭：平均绝对误差 0.1282 m；RMS 0.2895 m；末帧 0.0165 m
 开启组前两项汇总指标较低，但末帧绝对误差更高；仅描述已记录实测差异。</a:t>
+            </a:r>
+          </a:p>
+        </p:txBody>
+      </p:sp>
+      <p:sp>
+        <p:nvSpPr>
+          <p:cNvPr id="7" name="TextBox 6"/>
+          <p:cNvSpPr txBox="1"/>
+          <p:nvPr/>
+        </p:nvSpPr>
+        <p:spPr>
+          <a:xfrm>
+            <a:off x="658368" y="6080760"/>
+            <a:ext cx="10881360" cy="594360"/>
+          </a:xfrm>
+          <a:prstGeom prst="rect">
+            <a:avLst/>
+          </a:prstGeom>
+          <a:noFill/>
+        </p:spPr>
+        <p:txBody>
+          <a:bodyPr wrap="none">
+            <a:spAutoFit/>
+          </a:bodyPr>
+          <a:lstStyle/>
+          <a:p>
+            <a:pPr algn="l"/>
+            <a:r>
+              <a:rPr sz="1000" b="0">
+                <a:solidFill>
+                  <a:srgbClr val="505050"/>
+                </a:solidFill>
+                <a:latin typeface="宋体"/>
+              </a:rPr>
+              <a:t>两图来源 A、B（A：HPC 前馈开；B：HPC 前馈关）
+A：robot_traj/real/4d_artstein_forward_8traj_20260914_204226 / trial_02
+B：robot_traj/real/4d_artstein_no_forward_8traj_20260914_204546 / trial_01</a:t>
             </a:r>
           </a:p>
         </p:txBody>
@@ -4258,8 +4327,8 @@
         </p:nvSpPr>
         <p:spPr>
           <a:xfrm>
-            <a:off x="658368" y="4480560"/>
-            <a:ext cx="10881360" cy="1143000"/>
+            <a:off x="658368" y="4370832"/>
+            <a:ext cx="10881360" cy="1371600"/>
           </a:xfrm>
           <a:prstGeom prst="rect">
             <a:avLst/>
@@ -4267,6 +4336,43 @@
           <a:noFill/>
         </p:spPr>
         <p:txBody>
+          <a:bodyPr wrap="square">
+            <a:spAutoFit/>
+          </a:bodyPr>
+          <a:lstStyle/>
+          <a:p>
+            <a:pPr algn="l"/>
+            <a:r>
+              <a:rPr sz="1400" b="0">
+                <a:solidFill>
+                  <a:srgbClr val="2D2D2D"/>
+                </a:solidFill>
+                <a:latin typeface="宋体"/>
+              </a:rPr>
+              <a:t>HPC 代表组 A（前馈开）：平均绝对误差 0.1202 m，RMS 0.2791 m。
+LPC λ=2.0：平均绝对误差 0.4001 m，RMS 0.4547 m；LPC λ=2.5：0.4144 m，0.4771 m。
+安全边界：λ初值=1.5、Leader 速度 0.25 m/s 时发生碰撞，未形成有效轨迹统计。λ初值与 Leader 速度同时变化，现有 HPC/LPC 结果仅说明阶段性可运行性和现象，不宣称严格单变量性能优劣。</a:t>
+            </a:r>
+          </a:p>
+        </p:txBody>
+      </p:sp>
+      <p:sp>
+        <p:nvSpPr>
+          <p:cNvPr id="7" name="TextBox 6"/>
+          <p:cNvSpPr txBox="1"/>
+          <p:nvPr/>
+        </p:nvSpPr>
+        <p:spPr>
+          <a:xfrm>
+            <a:off x="658368" y="5852160"/>
+            <a:ext cx="10881360" cy="777240"/>
+          </a:xfrm>
+          <a:prstGeom prst="rect">
+            <a:avLst/>
+          </a:prstGeom>
+          <a:noFill/>
+        </p:spPr>
+        <p:txBody>
           <a:bodyPr wrap="none">
             <a:spAutoFit/>
           </a:bodyPr>
@@ -4274,14 +4380,16 @@
           <a:p>
             <a:pPr algn="l"/>
             <a:r>
-              <a:rPr sz="1500" b="0">
-                <a:solidFill>
-                  <a:srgbClr val="2D2D2D"/>
+              <a:rPr sz="1000" b="0">
+                <a:solidFill>
+                  <a:srgbClr val="505050"/>
                 </a:solidFill>
                 <a:latin typeface="宋体"/>
               </a:rPr>
-              <a:t>LPC λ=2.0：平均绝对误差 0.4001 m，RMS 0.4547 m；LPC λ=2.5：0.4144 m，0.4771 m。
-安全边界：λ初值=1.5、Leader 速度 0.25 m/s 时发生碰撞，未形成有效轨迹统计。λ初值与 Leader 速度同时变化，现有 HPC/LPC 结果仅说明阶段性可运行性和现象，不宣称严格单变量性能优劣。</a:t>
+              <a:t>两图来源 A、C、D（A：HPC 前馈开；C：LPC λ=2.0；D：LPC λ=2.5）
+A：robot_traj/real/4d_artstein_forward_8traj_20260914_204226 / trial_02
+C：robot_traj/real/4d_artstein_lpc_20260915_104805 / trial_01
+D：robot_traj/real/4d_artstein_lpc_20260915_105440 / trial_02</a:t>
             </a:r>
           </a:p>
         </p:txBody>
@@ -4608,7 +4716,7 @@
           <a:noFill/>
         </p:spPr>
         <p:txBody>
-          <a:bodyPr wrap="none">
+          <a:bodyPr wrap="square">
             <a:spAutoFit/>
           </a:bodyPr>
           <a:lstStyle/>

--- a/docs/reports/2026-09-15-real-robot-tracking/双移动机器人实物跟踪实验汇报.pptx
+++ b/docs/reports/2026-09-15-real-robot-tracking/双移动机器人实物跟踪实验汇报.pptx
@@ -3689,7 +3689,7 @@
               </a:defRPr>
             </a:pPr>
             <a:r>
-              <a:t>Artstein 变换用于处理输入延迟；HPC/LPC 为两类控制配置。</a:t>
+              <a:t>Artstein 积分项纳入历史控制输入以补偿纯滞后；HPC/LPC 为两类控制配置。</a:t>
             </a:r>
           </a:p>
           <a:p>
@@ -3706,6 +3706,22 @@
             </a:pPr>
             <a:r>
               <a:t>Follower 前向预测：由 Follower 当前动捕状态、最近输出命令和电机时间常数 τ 预测短时状态，补偿执行器响应。</a:t>
+            </a:r>
+          </a:p>
+          <a:p>
+            <a:pPr>
+              <a:spcAft>
+                <a:spcPts val="1400"/>
+              </a:spcAft>
+              <a:defRPr sz="1700">
+                <a:solidFill>
+                  <a:srgbClr val="2D2D2D"/>
+                </a:solidFill>
+                <a:latin typeface="宋体"/>
+              </a:defRPr>
+            </a:pPr>
+            <a:r>
+              <a:t>控制律针对预测状态而非滞后测量状态计算控制量。</a:t>
             </a:r>
           </a:p>
           <a:p>

--- a/docs/reports/2026-09-15-real-robot-tracking/双移动机器人实物跟踪实验汇报.pptx
+++ b/docs/reports/2026-09-15-real-robot-tracking/双移动机器人实物跟踪实验汇报.pptx
@@ -3904,7 +3904,7 @@
               </a:defRPr>
             </a:pPr>
             <a:r>
-              <a:t>评价采用控制器 radius=1.0 m；recording.ideal_radius_m=2.0 为记录器历史配置，不参与本次误差计算。</a:t>
+              <a:t>评价采用控制器 radius=1.0 m。</a:t>
             </a:r>
           </a:p>
           <a:p>
